--- a/my_new_template/presentaton/arkts_verifier_defense_template.pptx
+++ b/my_new_template/presentaton/arkts_verifier_defense_template.pptx
@@ -220,7 +220,7 @@
           <a:p>
             <a:fld id="{336340AA-E0B2-474B-9F8C-858D6BA4620A}" type="datetimeFigureOut">
               <a:rPr lang="en-RU" smtClean="0"/>
-              <a:t>10.06.2026</a:t>
+              <a:t>15.06.2026</a:t>
             </a:fld>
             <a:endParaRPr lang="en-RU"/>
           </a:p>
@@ -1939,7 +1939,7 @@
               </a:defRPr>
             </a:pPr>
             <a:r>
-              <a:rPr sz="900" b="0">
+              <a:rPr sz="900" b="0" dirty="0">
                 <a:solidFill>
                   <a:srgbClr val="546170"/>
                 </a:solidFill>
@@ -1947,7 +1947,7 @@
                 <a:ea typeface="Aptos"/>
                 <a:cs typeface="Aptos"/>
               </a:rPr>
-              <a:t>ArkTS bytecode verifier</a:t>
+              <a:t>bytecode verifier</a:t>
             </a:r>
           </a:p>
         </p:txBody>
@@ -2802,7 +2802,7 @@
               </a:defRPr>
             </a:pPr>
             <a:r>
-              <a:rPr sz="900" b="0">
+              <a:rPr sz="900" b="0" dirty="0">
                 <a:solidFill>
                   <a:srgbClr val="546170"/>
                 </a:solidFill>
@@ -2810,7 +2810,7 @@
                 <a:ea typeface="Aptos"/>
                 <a:cs typeface="Aptos"/>
               </a:rPr>
-              <a:t>ArkTS bytecode verifier</a:t>
+              <a:t>bytecode verifier</a:t>
             </a:r>
           </a:p>
         </p:txBody>
@@ -3881,22 +3881,57 @@
       </p:sp>
       <p:sp>
         <p:nvSpPr>
-          <p:cNvPr id="19" name="Rectangle 18">
-            <a:extLst>
-              <a:ext uri="{FF2B5EF4-FFF2-40B4-BE49-F238E27FC236}">
-                <a16:creationId xmlns:a16="http://schemas.microsoft.com/office/drawing/2014/main" id="{A617E151-6A15-497E-9593-A35B5A5CD5BF}"/>
-              </a:ext>
-            </a:extLst>
-          </p:cNvPr>
-          <p:cNvSpPr>
-            <a:spLocks noGrp="1"/>
-          </p:cNvSpPr>
-          <p:nvPr/>
-        </p:nvSpPr>
-        <p:spPr>
-          <a:xfrm>
-            <a:off x="6362700" y="2457450"/>
-            <a:ext cx="1323975" cy="247650"/>
+          <p:cNvPr id="20" name="arrow-line">
+            <a:extLst>
+              <a:ext uri="{FF2B5EF4-FFF2-40B4-BE49-F238E27FC236}">
+                <a16:creationId xmlns:a16="http://schemas.microsoft.com/office/drawing/2014/main" id="{C4E2AB6B-F1C8-4D25-ADBC-FE747FD8D3EF}"/>
+              </a:ext>
+            </a:extLst>
+          </p:cNvPr>
+          <p:cNvSpPr>
+            <a:spLocks noGrp="1"/>
+          </p:cNvSpPr>
+          <p:nvPr/>
+        </p:nvSpPr>
+        <p:spPr>
+          <a:xfrm>
+            <a:off x="7829550" y="2362200"/>
+            <a:ext cx="666750" cy="19050"/>
+          </a:xfrm>
+          <a:prstGeom prst="rect">
+            <a:avLst/>
+          </a:prstGeom>
+          <a:solidFill>
+            <a:srgbClr val="0F766E"/>
+          </a:solidFill>
+          <a:ln w="0">
+            <a:solidFill>
+              <a:srgbClr val="000000">
+                <a:alpha val="0"/>
+              </a:srgbClr>
+            </a:solidFill>
+            <a:prstDash val="solid"/>
+          </a:ln>
+        </p:spPr>
+      </p:sp>
+      <p:sp>
+        <p:nvSpPr>
+          <p:cNvPr id="21" name="Rectangle 20">
+            <a:extLst>
+              <a:ext uri="{FF2B5EF4-FFF2-40B4-BE49-F238E27FC236}">
+                <a16:creationId xmlns:a16="http://schemas.microsoft.com/office/drawing/2014/main" id="{B99D7BCE-C64C-4696-ABB0-13D8381D9DB3}"/>
+              </a:ext>
+            </a:extLst>
+          </p:cNvPr>
+          <p:cNvSpPr>
+            <a:spLocks noGrp="1"/>
+          </p:cNvSpPr>
+          <p:nvPr/>
+        </p:nvSpPr>
+        <p:spPr>
+          <a:xfrm>
+            <a:off x="8496300" y="2247900"/>
+            <a:ext cx="171450" cy="266700"/>
           </a:xfrm>
           <a:prstGeom prst="rect">
             <a:avLst/>
@@ -3919,6 +3954,167 @@
           <a:bodyPr lIns="0" tIns="0" rIns="0" bIns="0" anchor="t"/>
           <a:lstStyle/>
           <a:p>
+            <a:pPr algn="ctr">
+              <a:defRPr sz="1650" b="1">
+                <a:solidFill>
+                  <a:srgbClr val="0F766E"/>
+                </a:solidFill>
+                <a:latin typeface="Aptos"/>
+                <a:ea typeface="Aptos"/>
+                <a:cs typeface="Aptos"/>
+              </a:defRPr>
+            </a:pPr>
+            <a:r>
+              <a:rPr sz="1650" b="1">
+                <a:solidFill>
+                  <a:srgbClr val="0F766E"/>
+                </a:solidFill>
+                <a:latin typeface="Aptos"/>
+                <a:ea typeface="Aptos"/>
+                <a:cs typeface="Aptos"/>
+              </a:rPr>
+              <a:t>&gt;</a:t>
+            </a:r>
+          </a:p>
+        </p:txBody>
+      </p:sp>
+      <p:sp>
+        <p:nvSpPr>
+          <p:cNvPr id="22" name="diagram-node">
+            <a:extLst>
+              <a:ext uri="{FF2B5EF4-FFF2-40B4-BE49-F238E27FC236}">
+                <a16:creationId xmlns:a16="http://schemas.microsoft.com/office/drawing/2014/main" id="{0EFF8341-E7CC-41CD-B6BA-D8D4EDCBCD7C}"/>
+              </a:ext>
+            </a:extLst>
+          </p:cNvPr>
+          <p:cNvSpPr>
+            <a:spLocks noGrp="1"/>
+          </p:cNvSpPr>
+          <p:nvPr/>
+        </p:nvSpPr>
+        <p:spPr>
+          <a:xfrm>
+            <a:off x="8667750" y="1943100"/>
+            <a:ext cx="1666875" cy="876300"/>
+          </a:xfrm>
+          <a:prstGeom prst="rect">
+            <a:avLst/>
+          </a:prstGeom>
+          <a:solidFill>
+            <a:srgbClr val="FFFFFF"/>
+          </a:solidFill>
+          <a:ln w="9525">
+            <a:solidFill>
+              <a:srgbClr val="D8DDD6"/>
+            </a:solidFill>
+            <a:prstDash val="solid"/>
+          </a:ln>
+        </p:spPr>
+      </p:sp>
+      <p:sp>
+        <p:nvSpPr>
+          <p:cNvPr id="24" name="Rectangle 23">
+            <a:extLst>
+              <a:ext uri="{FF2B5EF4-FFF2-40B4-BE49-F238E27FC236}">
+                <a16:creationId xmlns:a16="http://schemas.microsoft.com/office/drawing/2014/main" id="{9BD7CE14-669F-4311-8376-08F35EBD8DC4}"/>
+              </a:ext>
+            </a:extLst>
+          </p:cNvPr>
+          <p:cNvSpPr>
+            <a:spLocks noGrp="1"/>
+          </p:cNvSpPr>
+          <p:nvPr/>
+        </p:nvSpPr>
+        <p:spPr>
+          <a:xfrm>
+            <a:off x="8839200" y="2076450"/>
+            <a:ext cx="1323975" cy="342900"/>
+          </a:xfrm>
+          <a:prstGeom prst="rect">
+            <a:avLst/>
+          </a:prstGeom>
+          <a:solidFill>
+            <a:srgbClr val="000000">
+              <a:alpha val="0"/>
+            </a:srgbClr>
+          </a:solidFill>
+          <a:ln w="0">
+            <a:solidFill>
+              <a:srgbClr val="000000">
+                <a:alpha val="0"/>
+              </a:srgbClr>
+            </a:solidFill>
+            <a:prstDash val="solid"/>
+          </a:ln>
+        </p:spPr>
+        <p:txBody>
+          <a:bodyPr lIns="0" tIns="0" rIns="0" bIns="0" anchor="t"/>
+          <a:lstStyle/>
+          <a:p>
+            <a:pPr algn="l">
+              <a:defRPr sz="1425" b="1">
+                <a:solidFill>
+                  <a:srgbClr val="17202A"/>
+                </a:solidFill>
+                <a:latin typeface="Aptos"/>
+                <a:ea typeface="Aptos"/>
+                <a:cs typeface="Aptos"/>
+              </a:defRPr>
+            </a:pPr>
+            <a:r>
+              <a:rPr sz="1425" b="1">
+                <a:solidFill>
+                  <a:srgbClr val="17202A"/>
+                </a:solidFill>
+                <a:latin typeface="Aptos"/>
+                <a:ea typeface="Aptos"/>
+                <a:cs typeface="Aptos"/>
+              </a:rPr>
+              <a:t>Байт-код</a:t>
+            </a:r>
+          </a:p>
+        </p:txBody>
+      </p:sp>
+      <p:sp>
+        <p:nvSpPr>
+          <p:cNvPr id="25" name="Rectangle 24">
+            <a:extLst>
+              <a:ext uri="{FF2B5EF4-FFF2-40B4-BE49-F238E27FC236}">
+                <a16:creationId xmlns:a16="http://schemas.microsoft.com/office/drawing/2014/main" id="{E553C4FA-2FA7-421B-9123-648933F05253}"/>
+              </a:ext>
+            </a:extLst>
+          </p:cNvPr>
+          <p:cNvSpPr>
+            <a:spLocks noGrp="1"/>
+          </p:cNvSpPr>
+          <p:nvPr/>
+        </p:nvSpPr>
+        <p:spPr>
+          <a:xfrm>
+            <a:off x="8839200" y="2457450"/>
+            <a:ext cx="1323975" cy="247650"/>
+          </a:xfrm>
+          <a:prstGeom prst="rect">
+            <a:avLst/>
+          </a:prstGeom>
+          <a:solidFill>
+            <a:srgbClr val="000000">
+              <a:alpha val="0"/>
+            </a:srgbClr>
+          </a:solidFill>
+          <a:ln w="0">
+            <a:solidFill>
+              <a:srgbClr val="000000">
+                <a:alpha val="0"/>
+              </a:srgbClr>
+            </a:solidFill>
+            <a:prstDash val="solid"/>
+          </a:ln>
+        </p:spPr>
+        <p:txBody>
+          <a:bodyPr lIns="0" tIns="0" rIns="0" bIns="0" anchor="t"/>
+          <a:lstStyle/>
+          <a:p>
             <a:pPr algn="l">
               <a:defRPr sz="1125" b="0">
                 <a:solidFill>
@@ -3930,6 +4126,772 @@
               </a:defRPr>
             </a:pPr>
             <a:r>
+              <a:rPr sz="1125" b="0">
+                <a:solidFill>
+                  <a:srgbClr val="546170"/>
+                </a:solidFill>
+                <a:latin typeface="Aptos"/>
+                <a:ea typeface="Aptos"/>
+                <a:cs typeface="Aptos"/>
+              </a:rPr>
+              <a:t>промежуточное представление</a:t>
+            </a:r>
+          </a:p>
+        </p:txBody>
+      </p:sp>
+      <p:sp>
+        <p:nvSpPr>
+          <p:cNvPr id="26" name="diagram-node">
+            <a:extLst>
+              <a:ext uri="{FF2B5EF4-FFF2-40B4-BE49-F238E27FC236}">
+                <a16:creationId xmlns:a16="http://schemas.microsoft.com/office/drawing/2014/main" id="{AC0FF9C1-957D-45D0-8DAB-D72CD200499D}"/>
+              </a:ext>
+            </a:extLst>
+          </p:cNvPr>
+          <p:cNvSpPr>
+            <a:spLocks noGrp="1"/>
+          </p:cNvSpPr>
+          <p:nvPr/>
+        </p:nvSpPr>
+        <p:spPr>
+          <a:xfrm>
+            <a:off x="7429500" y="3562350"/>
+            <a:ext cx="2143125" cy="952500"/>
+          </a:xfrm>
+          <a:prstGeom prst="rect">
+            <a:avLst/>
+          </a:prstGeom>
+          <a:solidFill>
+            <a:srgbClr val="E7F3F1"/>
+          </a:solidFill>
+          <a:ln w="9525">
+            <a:solidFill>
+              <a:srgbClr val="D8DDD6"/>
+            </a:solidFill>
+            <a:prstDash val="solid"/>
+          </a:ln>
+        </p:spPr>
+      </p:sp>
+      <p:sp>
+        <p:nvSpPr>
+          <p:cNvPr id="27" name="node-accent">
+            <a:extLst>
+              <a:ext uri="{FF2B5EF4-FFF2-40B4-BE49-F238E27FC236}">
+                <a16:creationId xmlns:a16="http://schemas.microsoft.com/office/drawing/2014/main" id="{0F2633CD-059D-4599-AE4E-C52EB82530FA}"/>
+              </a:ext>
+            </a:extLst>
+          </p:cNvPr>
+          <p:cNvSpPr>
+            <a:spLocks noGrp="1"/>
+          </p:cNvSpPr>
+          <p:nvPr/>
+        </p:nvSpPr>
+        <p:spPr>
+          <a:xfrm>
+            <a:off x="7429500" y="3562350"/>
+            <a:ext cx="57150" cy="952500"/>
+          </a:xfrm>
+          <a:prstGeom prst="rect">
+            <a:avLst/>
+          </a:prstGeom>
+          <a:solidFill>
+            <a:srgbClr val="0F766E"/>
+          </a:solidFill>
+          <a:ln w="0">
+            <a:solidFill>
+              <a:srgbClr val="000000">
+                <a:alpha val="0"/>
+              </a:srgbClr>
+            </a:solidFill>
+            <a:prstDash val="solid"/>
+          </a:ln>
+        </p:spPr>
+      </p:sp>
+      <p:sp>
+        <p:nvSpPr>
+          <p:cNvPr id="28" name="Rectangle 27">
+            <a:extLst>
+              <a:ext uri="{FF2B5EF4-FFF2-40B4-BE49-F238E27FC236}">
+                <a16:creationId xmlns:a16="http://schemas.microsoft.com/office/drawing/2014/main" id="{3DF9D9D9-9A51-4B24-9FEB-8208264DB293}"/>
+              </a:ext>
+            </a:extLst>
+          </p:cNvPr>
+          <p:cNvSpPr>
+            <a:spLocks noGrp="1"/>
+          </p:cNvSpPr>
+          <p:nvPr/>
+        </p:nvSpPr>
+        <p:spPr>
+          <a:xfrm>
+            <a:off x="7600950" y="3695700"/>
+            <a:ext cx="1800225" cy="342900"/>
+          </a:xfrm>
+          <a:prstGeom prst="rect">
+            <a:avLst/>
+          </a:prstGeom>
+          <a:solidFill>
+            <a:srgbClr val="000000">
+              <a:alpha val="0"/>
+            </a:srgbClr>
+          </a:solidFill>
+          <a:ln w="0">
+            <a:solidFill>
+              <a:srgbClr val="000000">
+                <a:alpha val="0"/>
+              </a:srgbClr>
+            </a:solidFill>
+            <a:prstDash val="solid"/>
+          </a:ln>
+        </p:spPr>
+        <p:txBody>
+          <a:bodyPr lIns="0" tIns="0" rIns="0" bIns="0" anchor="t"/>
+          <a:lstStyle/>
+          <a:p>
+            <a:pPr algn="l">
+              <a:defRPr sz="1425" b="1">
+                <a:solidFill>
+                  <a:srgbClr val="17202A"/>
+                </a:solidFill>
+                <a:latin typeface="Aptos"/>
+                <a:ea typeface="Aptos"/>
+                <a:cs typeface="Aptos"/>
+              </a:defRPr>
+            </a:pPr>
+            <a:r>
+              <a:rPr sz="1425" b="1">
+                <a:solidFill>
+                  <a:srgbClr val="17202A"/>
+                </a:solidFill>
+                <a:latin typeface="Aptos"/>
+                <a:ea typeface="Aptos"/>
+                <a:cs typeface="Aptos"/>
+              </a:rPr>
+              <a:t>Верификатор</a:t>
+            </a:r>
+          </a:p>
+        </p:txBody>
+      </p:sp>
+      <p:sp>
+        <p:nvSpPr>
+          <p:cNvPr id="29" name="Rectangle 28">
+            <a:extLst>
+              <a:ext uri="{FF2B5EF4-FFF2-40B4-BE49-F238E27FC236}">
+                <a16:creationId xmlns:a16="http://schemas.microsoft.com/office/drawing/2014/main" id="{47C4FA66-30CA-4580-AF4B-96478CD46190}"/>
+              </a:ext>
+            </a:extLst>
+          </p:cNvPr>
+          <p:cNvSpPr>
+            <a:spLocks noGrp="1"/>
+          </p:cNvSpPr>
+          <p:nvPr/>
+        </p:nvSpPr>
+        <p:spPr>
+          <a:xfrm>
+            <a:off x="7600950" y="4076700"/>
+            <a:ext cx="1800225" cy="323850"/>
+          </a:xfrm>
+          <a:prstGeom prst="rect">
+            <a:avLst/>
+          </a:prstGeom>
+          <a:solidFill>
+            <a:srgbClr val="000000">
+              <a:alpha val="0"/>
+            </a:srgbClr>
+          </a:solidFill>
+          <a:ln w="0">
+            <a:solidFill>
+              <a:srgbClr val="000000">
+                <a:alpha val="0"/>
+              </a:srgbClr>
+            </a:solidFill>
+            <a:prstDash val="solid"/>
+          </a:ln>
+        </p:spPr>
+        <p:txBody>
+          <a:bodyPr lIns="0" tIns="0" rIns="0" bIns="0" anchor="t"/>
+          <a:lstStyle/>
+          <a:p>
+            <a:pPr algn="l">
+              <a:defRPr sz="1125" b="0">
+                <a:solidFill>
+                  <a:srgbClr val="546170"/>
+                </a:solidFill>
+                <a:latin typeface="Aptos"/>
+                <a:ea typeface="Aptos"/>
+                <a:cs typeface="Aptos"/>
+              </a:defRPr>
+            </a:pPr>
+            <a:r>
+              <a:rPr sz="1125" b="0">
+                <a:solidFill>
+                  <a:srgbClr val="546170"/>
+                </a:solidFill>
+                <a:latin typeface="Aptos"/>
+                <a:ea typeface="Aptos"/>
+                <a:cs typeface="Aptos"/>
+              </a:rPr>
+              <a:t>статическая проверка метода</a:t>
+            </a:r>
+          </a:p>
+        </p:txBody>
+      </p:sp>
+      <p:sp>
+        <p:nvSpPr>
+          <p:cNvPr id="30" name="arrow-line">
+            <a:extLst>
+              <a:ext uri="{FF2B5EF4-FFF2-40B4-BE49-F238E27FC236}">
+                <a16:creationId xmlns:a16="http://schemas.microsoft.com/office/drawing/2014/main" id="{C9434075-5EDE-4174-A945-EE28FDCDBD01}"/>
+              </a:ext>
+            </a:extLst>
+          </p:cNvPr>
+          <p:cNvSpPr>
+            <a:spLocks noGrp="1"/>
+          </p:cNvSpPr>
+          <p:nvPr/>
+        </p:nvSpPr>
+        <p:spPr>
+          <a:xfrm>
+            <a:off x="9544050" y="4000500"/>
+            <a:ext cx="609600" cy="19050"/>
+          </a:xfrm>
+          <a:prstGeom prst="rect">
+            <a:avLst/>
+          </a:prstGeom>
+          <a:solidFill>
+            <a:srgbClr val="0F766E"/>
+          </a:solidFill>
+          <a:ln w="0">
+            <a:solidFill>
+              <a:srgbClr val="000000">
+                <a:alpha val="0"/>
+              </a:srgbClr>
+            </a:solidFill>
+            <a:prstDash val="solid"/>
+          </a:ln>
+        </p:spPr>
+      </p:sp>
+      <p:sp>
+        <p:nvSpPr>
+          <p:cNvPr id="31" name="Rectangle 30">
+            <a:extLst>
+              <a:ext uri="{FF2B5EF4-FFF2-40B4-BE49-F238E27FC236}">
+                <a16:creationId xmlns:a16="http://schemas.microsoft.com/office/drawing/2014/main" id="{B4D57484-8C1F-430C-858F-AB63038C6F69}"/>
+              </a:ext>
+            </a:extLst>
+          </p:cNvPr>
+          <p:cNvSpPr>
+            <a:spLocks noGrp="1"/>
+          </p:cNvSpPr>
+          <p:nvPr/>
+        </p:nvSpPr>
+        <p:spPr>
+          <a:xfrm>
+            <a:off x="10153650" y="3886200"/>
+            <a:ext cx="171450" cy="266700"/>
+          </a:xfrm>
+          <a:prstGeom prst="rect">
+            <a:avLst/>
+          </a:prstGeom>
+          <a:solidFill>
+            <a:srgbClr val="000000">
+              <a:alpha val="0"/>
+            </a:srgbClr>
+          </a:solidFill>
+          <a:ln w="0">
+            <a:solidFill>
+              <a:srgbClr val="000000">
+                <a:alpha val="0"/>
+              </a:srgbClr>
+            </a:solidFill>
+            <a:prstDash val="solid"/>
+          </a:ln>
+        </p:spPr>
+        <p:txBody>
+          <a:bodyPr lIns="0" tIns="0" rIns="0" bIns="0" anchor="t"/>
+          <a:lstStyle/>
+          <a:p>
+            <a:pPr algn="ctr">
+              <a:defRPr sz="1650" b="1">
+                <a:solidFill>
+                  <a:srgbClr val="0F766E"/>
+                </a:solidFill>
+                <a:latin typeface="Aptos"/>
+                <a:ea typeface="Aptos"/>
+                <a:cs typeface="Aptos"/>
+              </a:defRPr>
+            </a:pPr>
+            <a:r>
+              <a:rPr sz="1650" b="1">
+                <a:solidFill>
+                  <a:srgbClr val="0F766E"/>
+                </a:solidFill>
+                <a:latin typeface="Aptos"/>
+                <a:ea typeface="Aptos"/>
+                <a:cs typeface="Aptos"/>
+              </a:rPr>
+              <a:t>&gt;</a:t>
+            </a:r>
+          </a:p>
+        </p:txBody>
+      </p:sp>
+      <p:sp>
+        <p:nvSpPr>
+          <p:cNvPr id="32" name="diagram-node">
+            <a:extLst>
+              <a:ext uri="{FF2B5EF4-FFF2-40B4-BE49-F238E27FC236}">
+                <a16:creationId xmlns:a16="http://schemas.microsoft.com/office/drawing/2014/main" id="{E5BAD49C-D2C3-4A8C-B584-3DB697622229}"/>
+              </a:ext>
+            </a:extLst>
+          </p:cNvPr>
+          <p:cNvSpPr>
+            <a:spLocks noGrp="1"/>
+          </p:cNvSpPr>
+          <p:nvPr/>
+        </p:nvSpPr>
+        <p:spPr>
+          <a:xfrm>
+            <a:off x="10334625" y="3467100"/>
+            <a:ext cx="1638300" cy="1219200"/>
+          </a:xfrm>
+          <a:prstGeom prst="rect">
+            <a:avLst/>
+          </a:prstGeom>
+          <a:solidFill>
+            <a:srgbClr val="FFFFFF"/>
+          </a:solidFill>
+          <a:ln w="9525">
+            <a:solidFill>
+              <a:srgbClr val="D8DDD6"/>
+            </a:solidFill>
+            <a:prstDash val="solid"/>
+          </a:ln>
+        </p:spPr>
+      </p:sp>
+      <p:sp>
+        <p:nvSpPr>
+          <p:cNvPr id="33" name="node-accent">
+            <a:extLst>
+              <a:ext uri="{FF2B5EF4-FFF2-40B4-BE49-F238E27FC236}">
+                <a16:creationId xmlns:a16="http://schemas.microsoft.com/office/drawing/2014/main" id="{BFFF711F-5096-4F92-A01D-26E618D3E432}"/>
+              </a:ext>
+            </a:extLst>
+          </p:cNvPr>
+          <p:cNvSpPr>
+            <a:spLocks noGrp="1"/>
+          </p:cNvSpPr>
+          <p:nvPr/>
+        </p:nvSpPr>
+        <p:spPr>
+          <a:xfrm flipH="1">
+            <a:off x="10296117" y="3467099"/>
+            <a:ext cx="45719" cy="1219199"/>
+          </a:xfrm>
+          <a:prstGeom prst="rect">
+            <a:avLst/>
+          </a:prstGeom>
+          <a:solidFill>
+            <a:srgbClr val="0F766E"/>
+          </a:solidFill>
+          <a:ln w="0">
+            <a:solidFill>
+              <a:srgbClr val="000000">
+                <a:alpha val="0"/>
+              </a:srgbClr>
+            </a:solidFill>
+            <a:prstDash val="solid"/>
+          </a:ln>
+        </p:spPr>
+      </p:sp>
+      <p:sp>
+        <p:nvSpPr>
+          <p:cNvPr id="34" name="Rectangle 33">
+            <a:extLst>
+              <a:ext uri="{FF2B5EF4-FFF2-40B4-BE49-F238E27FC236}">
+                <a16:creationId xmlns:a16="http://schemas.microsoft.com/office/drawing/2014/main" id="{089B9904-95A6-4516-AD49-52216D1B0EA1}"/>
+              </a:ext>
+            </a:extLst>
+          </p:cNvPr>
+          <p:cNvSpPr>
+            <a:spLocks noGrp="1"/>
+          </p:cNvSpPr>
+          <p:nvPr/>
+        </p:nvSpPr>
+        <p:spPr>
+          <a:xfrm>
+            <a:off x="10515600" y="3695700"/>
+            <a:ext cx="1295400" cy="342900"/>
+          </a:xfrm>
+          <a:prstGeom prst="rect">
+            <a:avLst/>
+          </a:prstGeom>
+          <a:solidFill>
+            <a:srgbClr val="000000">
+              <a:alpha val="0"/>
+            </a:srgbClr>
+          </a:solidFill>
+          <a:ln w="0">
+            <a:solidFill>
+              <a:srgbClr val="000000">
+                <a:alpha val="0"/>
+              </a:srgbClr>
+            </a:solidFill>
+            <a:prstDash val="solid"/>
+          </a:ln>
+        </p:spPr>
+        <p:txBody>
+          <a:bodyPr lIns="0" tIns="0" rIns="0" bIns="0" anchor="t"/>
+          <a:lstStyle/>
+          <a:p>
+            <a:pPr algn="l">
+              <a:defRPr sz="1425" b="1">
+                <a:solidFill>
+                  <a:srgbClr val="17202A"/>
+                </a:solidFill>
+                <a:latin typeface="Aptos"/>
+                <a:ea typeface="Aptos"/>
+                <a:cs typeface="Aptos"/>
+              </a:defRPr>
+            </a:pPr>
+            <a:r>
+              <a:rPr sz="1425" b="1">
+                <a:solidFill>
+                  <a:srgbClr val="17202A"/>
+                </a:solidFill>
+                <a:latin typeface="Aptos"/>
+                <a:ea typeface="Aptos"/>
+                <a:cs typeface="Aptos"/>
+              </a:rPr>
+              <a:t>VM / runtime</a:t>
+            </a:r>
+          </a:p>
+        </p:txBody>
+      </p:sp>
+      <p:sp>
+        <p:nvSpPr>
+          <p:cNvPr id="35" name="Rectangle 34">
+            <a:extLst>
+              <a:ext uri="{FF2B5EF4-FFF2-40B4-BE49-F238E27FC236}">
+                <a16:creationId xmlns:a16="http://schemas.microsoft.com/office/drawing/2014/main" id="{74876613-C646-4D32-849F-AEB0859523A1}"/>
+              </a:ext>
+            </a:extLst>
+          </p:cNvPr>
+          <p:cNvSpPr>
+            <a:spLocks noGrp="1"/>
+          </p:cNvSpPr>
+          <p:nvPr/>
+        </p:nvSpPr>
+        <p:spPr>
+          <a:xfrm>
+            <a:off x="10515600" y="4076700"/>
+            <a:ext cx="1295400" cy="438150"/>
+          </a:xfrm>
+          <a:prstGeom prst="rect">
+            <a:avLst/>
+          </a:prstGeom>
+          <a:solidFill>
+            <a:srgbClr val="000000">
+              <a:alpha val="0"/>
+            </a:srgbClr>
+          </a:solidFill>
+          <a:ln w="0">
+            <a:solidFill>
+              <a:srgbClr val="000000">
+                <a:alpha val="0"/>
+              </a:srgbClr>
+            </a:solidFill>
+            <a:prstDash val="solid"/>
+          </a:ln>
+        </p:spPr>
+        <p:txBody>
+          <a:bodyPr lIns="0" tIns="0" rIns="0" bIns="0" anchor="t"/>
+          <a:lstStyle/>
+          <a:p>
+            <a:pPr algn="l">
+              <a:defRPr sz="1125" b="0">
+                <a:solidFill>
+                  <a:srgbClr val="546170"/>
+                </a:solidFill>
+                <a:latin typeface="Aptos"/>
+                <a:ea typeface="Aptos"/>
+                <a:cs typeface="Aptos"/>
+              </a:defRPr>
+            </a:pPr>
+            <a:r>
+              <a:rPr sz="1125" b="0">
+                <a:solidFill>
+                  <a:srgbClr val="546170"/>
+                </a:solidFill>
+                <a:latin typeface="Aptos"/>
+                <a:ea typeface="Aptos"/>
+                <a:cs typeface="Aptos"/>
+              </a:rPr>
+              <a:t>исполнение без повторения всех проверок</a:t>
+            </a:r>
+          </a:p>
+        </p:txBody>
+      </p:sp>
+      <p:sp>
+        <p:nvSpPr>
+          <p:cNvPr id="37" name="Rectangle 36">
+            <a:extLst>
+              <a:ext uri="{FF2B5EF4-FFF2-40B4-BE49-F238E27FC236}">
+                <a16:creationId xmlns:a16="http://schemas.microsoft.com/office/drawing/2014/main" id="{ABF49B3D-0073-4D5C-B5ED-0C4F954778C7}"/>
+              </a:ext>
+            </a:extLst>
+          </p:cNvPr>
+          <p:cNvSpPr>
+            <a:spLocks noGrp="1"/>
+          </p:cNvSpPr>
+          <p:nvPr/>
+        </p:nvSpPr>
+        <p:spPr>
+          <a:xfrm>
+            <a:off x="666750" y="4953000"/>
+            <a:ext cx="5429250" cy="495300"/>
+          </a:xfrm>
+          <a:prstGeom prst="rect">
+            <a:avLst/>
+          </a:prstGeom>
+          <a:solidFill>
+            <a:srgbClr val="000000">
+              <a:alpha val="0"/>
+            </a:srgbClr>
+          </a:solidFill>
+          <a:ln w="0">
+            <a:solidFill>
+              <a:srgbClr val="000000">
+                <a:alpha val="0"/>
+              </a:srgbClr>
+            </a:solidFill>
+            <a:prstDash val="solid"/>
+          </a:ln>
+        </p:spPr>
+        <p:txBody>
+          <a:bodyPr lIns="0" tIns="0" rIns="0" bIns="0" anchor="t"/>
+          <a:lstStyle/>
+          <a:p>
+            <a:pPr algn="l">
+              <a:defRPr sz="1650" b="1">
+                <a:solidFill>
+                  <a:srgbClr val="17202A"/>
+                </a:solidFill>
+                <a:latin typeface="Aptos"/>
+                <a:ea typeface="Aptos"/>
+                <a:cs typeface="Aptos"/>
+              </a:defRPr>
+            </a:pPr>
+            <a:r>
+              <a:rPr sz="1650" b="1" dirty="0" err="1">
+                <a:solidFill>
+                  <a:srgbClr val="17202A"/>
+                </a:solidFill>
+                <a:latin typeface="Aptos"/>
+                <a:ea typeface="Aptos"/>
+                <a:cs typeface="Aptos"/>
+              </a:rPr>
+              <a:t>Ценность</a:t>
+            </a:r>
+            <a:r>
+              <a:rPr sz="1650" b="1" dirty="0">
+                <a:solidFill>
+                  <a:srgbClr val="17202A"/>
+                </a:solidFill>
+                <a:latin typeface="Aptos"/>
+                <a:ea typeface="Aptos"/>
+                <a:cs typeface="Aptos"/>
+              </a:rPr>
+              <a:t>: </a:t>
+            </a:r>
+            <a:r>
+              <a:rPr lang="ru-RU" sz="1650" b="1" dirty="0">
+                <a:solidFill>
+                  <a:srgbClr val="17202A"/>
+                </a:solidFill>
+                <a:latin typeface="Aptos"/>
+                <a:ea typeface="Aptos"/>
+                <a:cs typeface="Aptos"/>
+              </a:rPr>
+              <a:t>минимизация </a:t>
+            </a:r>
+            <a:r>
+              <a:rPr sz="1650" b="1" dirty="0" err="1">
+                <a:solidFill>
+                  <a:srgbClr val="17202A"/>
+                </a:solidFill>
+                <a:latin typeface="Aptos"/>
+                <a:ea typeface="Aptos"/>
+                <a:cs typeface="Aptos"/>
+              </a:rPr>
+              <a:t>аварийных</a:t>
+            </a:r>
+            <a:r>
+              <a:rPr sz="1650" b="1" dirty="0">
+                <a:solidFill>
+                  <a:srgbClr val="17202A"/>
+                </a:solidFill>
+                <a:latin typeface="Aptos"/>
+                <a:ea typeface="Aptos"/>
+                <a:cs typeface="Aptos"/>
+              </a:rPr>
+              <a:t> </a:t>
+            </a:r>
+            <a:r>
+              <a:rPr sz="1650" b="1" dirty="0" err="1">
+                <a:solidFill>
+                  <a:srgbClr val="17202A"/>
+                </a:solidFill>
+                <a:latin typeface="Aptos"/>
+                <a:ea typeface="Aptos"/>
+                <a:cs typeface="Aptos"/>
+              </a:rPr>
+              <a:t>сценариев</a:t>
+            </a:r>
+            <a:r>
+              <a:rPr lang="ru-RU" sz="1650" b="1" dirty="0">
+                <a:solidFill>
+                  <a:srgbClr val="17202A"/>
+                </a:solidFill>
+                <a:latin typeface="Aptos"/>
+                <a:ea typeface="Aptos"/>
+                <a:cs typeface="Aptos"/>
+              </a:rPr>
+              <a:t> на этапе исполнения</a:t>
+            </a:r>
+            <a:r>
+              <a:rPr sz="1650" b="1" dirty="0">
+                <a:solidFill>
+                  <a:srgbClr val="17202A"/>
+                </a:solidFill>
+                <a:latin typeface="Aptos"/>
+                <a:ea typeface="Aptos"/>
+                <a:cs typeface="Aptos"/>
+              </a:rPr>
+              <a:t>.</a:t>
+            </a:r>
+          </a:p>
+        </p:txBody>
+      </p:sp>
+      <p:sp>
+        <p:nvSpPr>
+          <p:cNvPr id="36" name="node-accent">
+            <a:extLst>
+              <a:ext uri="{FF2B5EF4-FFF2-40B4-BE49-F238E27FC236}">
+                <a16:creationId xmlns:a16="http://schemas.microsoft.com/office/drawing/2014/main" id="{255CF626-9A3F-4B12-2469-41F7C51C8225}"/>
+              </a:ext>
+            </a:extLst>
+          </p:cNvPr>
+          <p:cNvSpPr>
+            <a:spLocks noGrp="1"/>
+          </p:cNvSpPr>
+          <p:nvPr/>
+        </p:nvSpPr>
+        <p:spPr>
+          <a:xfrm>
+            <a:off x="8667750" y="1933575"/>
+            <a:ext cx="57150" cy="876300"/>
+          </a:xfrm>
+          <a:prstGeom prst="rect">
+            <a:avLst/>
+          </a:prstGeom>
+          <a:solidFill>
+            <a:srgbClr val="0F766E"/>
+          </a:solidFill>
+          <a:ln w="0">
+            <a:solidFill>
+              <a:srgbClr val="000000">
+                <a:alpha val="0"/>
+              </a:srgbClr>
+            </a:solidFill>
+            <a:prstDash val="solid"/>
+          </a:ln>
+        </p:spPr>
+      </p:sp>
+      <p:sp>
+        <p:nvSpPr>
+          <p:cNvPr id="39" name="TextBox 38">
+            <a:extLst>
+              <a:ext uri="{FF2B5EF4-FFF2-40B4-BE49-F238E27FC236}">
+                <a16:creationId xmlns:a16="http://schemas.microsoft.com/office/drawing/2014/main" id="{50526B08-37B6-CAB7-73E4-38E352772A51}"/>
+              </a:ext>
+            </a:extLst>
+          </p:cNvPr>
+          <p:cNvSpPr txBox="1"/>
+          <p:nvPr/>
+        </p:nvSpPr>
+        <p:spPr>
+          <a:xfrm>
+            <a:off x="11667281" y="6493397"/>
+            <a:ext cx="301686" cy="369332"/>
+          </a:xfrm>
+          <a:prstGeom prst="rect">
+            <a:avLst/>
+          </a:prstGeom>
+          <a:noFill/>
+        </p:spPr>
+        <p:txBody>
+          <a:bodyPr wrap="none" rtlCol="0">
+            <a:spAutoFit/>
+          </a:bodyPr>
+          <a:lstStyle/>
+          <a:p>
+            <a:r>
+              <a:rPr lang="en-RU" dirty="0"/>
+              <a:t>2</a:t>
+            </a:r>
+          </a:p>
+        </p:txBody>
+      </p:sp>
+      <p:sp>
+        <p:nvSpPr>
+          <p:cNvPr id="19" name="Rectangle 18">
+            <a:extLst>
+              <a:ext uri="{FF2B5EF4-FFF2-40B4-BE49-F238E27FC236}">
+                <a16:creationId xmlns:a16="http://schemas.microsoft.com/office/drawing/2014/main" id="{A617E151-6A15-497E-9593-A35B5A5CD5BF}"/>
+              </a:ext>
+            </a:extLst>
+          </p:cNvPr>
+          <p:cNvSpPr>
+            <a:spLocks noGrp="1"/>
+          </p:cNvSpPr>
+          <p:nvPr/>
+        </p:nvSpPr>
+        <p:spPr>
+          <a:xfrm>
+            <a:off x="6362700" y="2457450"/>
+            <a:ext cx="1323975" cy="247650"/>
+          </a:xfrm>
+          <a:prstGeom prst="rect">
+            <a:avLst/>
+          </a:prstGeom>
+          <a:solidFill>
+            <a:srgbClr val="000000">
+              <a:alpha val="0"/>
+            </a:srgbClr>
+          </a:solidFill>
+          <a:ln w="0">
+            <a:solidFill>
+              <a:srgbClr val="000000">
+                <a:alpha val="0"/>
+              </a:srgbClr>
+            </a:solidFill>
+            <a:prstDash val="solid"/>
+          </a:ln>
+        </p:spPr>
+        <p:txBody>
+          <a:bodyPr lIns="0" tIns="0" rIns="0" bIns="0" anchor="t"/>
+          <a:lstStyle/>
+          <a:p>
+            <a:pPr algn="l">
+              <a:defRPr sz="1125" b="0">
+                <a:solidFill>
+                  <a:srgbClr val="546170"/>
+                </a:solidFill>
+                <a:latin typeface="Aptos"/>
+                <a:ea typeface="Aptos"/>
+                <a:cs typeface="Aptos"/>
+              </a:defRPr>
+            </a:pPr>
+            <a:r>
               <a:rPr lang="en-US" sz="1125" dirty="0">
                 <a:solidFill>
                   <a:srgbClr val="546170"/>
@@ -3941,7 +4903,7 @@
               <a:t>Java / </a:t>
             </a:r>
             <a:r>
-              <a:rPr sz="1125" b="0" dirty="0" err="1">
+              <a:rPr lang="en-US" sz="1125" b="0" dirty="0">
                 <a:solidFill>
                   <a:srgbClr val="546170"/>
                 </a:solidFill>
@@ -3949,7 +4911,7 @@
                 <a:ea typeface="Aptos"/>
                 <a:cs typeface="Aptos"/>
               </a:rPr>
-              <a:t>ArkTS</a:t>
+              <a:t>C#</a:t>
             </a:r>
             <a:r>
               <a:rPr sz="1125" b="0" dirty="0">
@@ -4003,968 +4965,6 @@
               <a:ea typeface="Aptos"/>
               <a:cs typeface="Aptos"/>
             </a:endParaRPr>
-          </a:p>
-        </p:txBody>
-      </p:sp>
-      <p:sp>
-        <p:nvSpPr>
-          <p:cNvPr id="20" name="arrow-line">
-            <a:extLst>
-              <a:ext uri="{FF2B5EF4-FFF2-40B4-BE49-F238E27FC236}">
-                <a16:creationId xmlns:a16="http://schemas.microsoft.com/office/drawing/2014/main" id="{C4E2AB6B-F1C8-4D25-ADBC-FE747FD8D3EF}"/>
-              </a:ext>
-            </a:extLst>
-          </p:cNvPr>
-          <p:cNvSpPr>
-            <a:spLocks noGrp="1"/>
-          </p:cNvSpPr>
-          <p:nvPr/>
-        </p:nvSpPr>
-        <p:spPr>
-          <a:xfrm>
-            <a:off x="7829550" y="2362200"/>
-            <a:ext cx="666750" cy="19050"/>
-          </a:xfrm>
-          <a:prstGeom prst="rect">
-            <a:avLst/>
-          </a:prstGeom>
-          <a:solidFill>
-            <a:srgbClr val="0F766E"/>
-          </a:solidFill>
-          <a:ln w="0">
-            <a:solidFill>
-              <a:srgbClr val="000000">
-                <a:alpha val="0"/>
-              </a:srgbClr>
-            </a:solidFill>
-            <a:prstDash val="solid"/>
-          </a:ln>
-        </p:spPr>
-      </p:sp>
-      <p:sp>
-        <p:nvSpPr>
-          <p:cNvPr id="21" name="Rectangle 20">
-            <a:extLst>
-              <a:ext uri="{FF2B5EF4-FFF2-40B4-BE49-F238E27FC236}">
-                <a16:creationId xmlns:a16="http://schemas.microsoft.com/office/drawing/2014/main" id="{B99D7BCE-C64C-4696-ABB0-13D8381D9DB3}"/>
-              </a:ext>
-            </a:extLst>
-          </p:cNvPr>
-          <p:cNvSpPr>
-            <a:spLocks noGrp="1"/>
-          </p:cNvSpPr>
-          <p:nvPr/>
-        </p:nvSpPr>
-        <p:spPr>
-          <a:xfrm>
-            <a:off x="8496300" y="2247900"/>
-            <a:ext cx="171450" cy="266700"/>
-          </a:xfrm>
-          <a:prstGeom prst="rect">
-            <a:avLst/>
-          </a:prstGeom>
-          <a:solidFill>
-            <a:srgbClr val="000000">
-              <a:alpha val="0"/>
-            </a:srgbClr>
-          </a:solidFill>
-          <a:ln w="0">
-            <a:solidFill>
-              <a:srgbClr val="000000">
-                <a:alpha val="0"/>
-              </a:srgbClr>
-            </a:solidFill>
-            <a:prstDash val="solid"/>
-          </a:ln>
-        </p:spPr>
-        <p:txBody>
-          <a:bodyPr lIns="0" tIns="0" rIns="0" bIns="0" anchor="t"/>
-          <a:lstStyle/>
-          <a:p>
-            <a:pPr algn="ctr">
-              <a:defRPr sz="1650" b="1">
-                <a:solidFill>
-                  <a:srgbClr val="0F766E"/>
-                </a:solidFill>
-                <a:latin typeface="Aptos"/>
-                <a:ea typeface="Aptos"/>
-                <a:cs typeface="Aptos"/>
-              </a:defRPr>
-            </a:pPr>
-            <a:r>
-              <a:rPr sz="1650" b="1">
-                <a:solidFill>
-                  <a:srgbClr val="0F766E"/>
-                </a:solidFill>
-                <a:latin typeface="Aptos"/>
-                <a:ea typeface="Aptos"/>
-                <a:cs typeface="Aptos"/>
-              </a:rPr>
-              <a:t>&gt;</a:t>
-            </a:r>
-          </a:p>
-        </p:txBody>
-      </p:sp>
-      <p:sp>
-        <p:nvSpPr>
-          <p:cNvPr id="22" name="diagram-node">
-            <a:extLst>
-              <a:ext uri="{FF2B5EF4-FFF2-40B4-BE49-F238E27FC236}">
-                <a16:creationId xmlns:a16="http://schemas.microsoft.com/office/drawing/2014/main" id="{0EFF8341-E7CC-41CD-B6BA-D8D4EDCBCD7C}"/>
-              </a:ext>
-            </a:extLst>
-          </p:cNvPr>
-          <p:cNvSpPr>
-            <a:spLocks noGrp="1"/>
-          </p:cNvSpPr>
-          <p:nvPr/>
-        </p:nvSpPr>
-        <p:spPr>
-          <a:xfrm>
-            <a:off x="8667750" y="1943100"/>
-            <a:ext cx="1666875" cy="876300"/>
-          </a:xfrm>
-          <a:prstGeom prst="rect">
-            <a:avLst/>
-          </a:prstGeom>
-          <a:solidFill>
-            <a:srgbClr val="FFFFFF"/>
-          </a:solidFill>
-          <a:ln w="9525">
-            <a:solidFill>
-              <a:srgbClr val="D8DDD6"/>
-            </a:solidFill>
-            <a:prstDash val="solid"/>
-          </a:ln>
-        </p:spPr>
-      </p:sp>
-      <p:sp>
-        <p:nvSpPr>
-          <p:cNvPr id="24" name="Rectangle 23">
-            <a:extLst>
-              <a:ext uri="{FF2B5EF4-FFF2-40B4-BE49-F238E27FC236}">
-                <a16:creationId xmlns:a16="http://schemas.microsoft.com/office/drawing/2014/main" id="{9BD7CE14-669F-4311-8376-08F35EBD8DC4}"/>
-              </a:ext>
-            </a:extLst>
-          </p:cNvPr>
-          <p:cNvSpPr>
-            <a:spLocks noGrp="1"/>
-          </p:cNvSpPr>
-          <p:nvPr/>
-        </p:nvSpPr>
-        <p:spPr>
-          <a:xfrm>
-            <a:off x="8839200" y="2076450"/>
-            <a:ext cx="1323975" cy="342900"/>
-          </a:xfrm>
-          <a:prstGeom prst="rect">
-            <a:avLst/>
-          </a:prstGeom>
-          <a:solidFill>
-            <a:srgbClr val="000000">
-              <a:alpha val="0"/>
-            </a:srgbClr>
-          </a:solidFill>
-          <a:ln w="0">
-            <a:solidFill>
-              <a:srgbClr val="000000">
-                <a:alpha val="0"/>
-              </a:srgbClr>
-            </a:solidFill>
-            <a:prstDash val="solid"/>
-          </a:ln>
-        </p:spPr>
-        <p:txBody>
-          <a:bodyPr lIns="0" tIns="0" rIns="0" bIns="0" anchor="t"/>
-          <a:lstStyle/>
-          <a:p>
-            <a:pPr algn="l">
-              <a:defRPr sz="1425" b="1">
-                <a:solidFill>
-                  <a:srgbClr val="17202A"/>
-                </a:solidFill>
-                <a:latin typeface="Aptos"/>
-                <a:ea typeface="Aptos"/>
-                <a:cs typeface="Aptos"/>
-              </a:defRPr>
-            </a:pPr>
-            <a:r>
-              <a:rPr sz="1425" b="1">
-                <a:solidFill>
-                  <a:srgbClr val="17202A"/>
-                </a:solidFill>
-                <a:latin typeface="Aptos"/>
-                <a:ea typeface="Aptos"/>
-                <a:cs typeface="Aptos"/>
-              </a:rPr>
-              <a:t>Байт-код</a:t>
-            </a:r>
-          </a:p>
-        </p:txBody>
-      </p:sp>
-      <p:sp>
-        <p:nvSpPr>
-          <p:cNvPr id="25" name="Rectangle 24">
-            <a:extLst>
-              <a:ext uri="{FF2B5EF4-FFF2-40B4-BE49-F238E27FC236}">
-                <a16:creationId xmlns:a16="http://schemas.microsoft.com/office/drawing/2014/main" id="{E553C4FA-2FA7-421B-9123-648933F05253}"/>
-              </a:ext>
-            </a:extLst>
-          </p:cNvPr>
-          <p:cNvSpPr>
-            <a:spLocks noGrp="1"/>
-          </p:cNvSpPr>
-          <p:nvPr/>
-        </p:nvSpPr>
-        <p:spPr>
-          <a:xfrm>
-            <a:off x="8839200" y="2457450"/>
-            <a:ext cx="1323975" cy="247650"/>
-          </a:xfrm>
-          <a:prstGeom prst="rect">
-            <a:avLst/>
-          </a:prstGeom>
-          <a:solidFill>
-            <a:srgbClr val="000000">
-              <a:alpha val="0"/>
-            </a:srgbClr>
-          </a:solidFill>
-          <a:ln w="0">
-            <a:solidFill>
-              <a:srgbClr val="000000">
-                <a:alpha val="0"/>
-              </a:srgbClr>
-            </a:solidFill>
-            <a:prstDash val="solid"/>
-          </a:ln>
-        </p:spPr>
-        <p:txBody>
-          <a:bodyPr lIns="0" tIns="0" rIns="0" bIns="0" anchor="t"/>
-          <a:lstStyle/>
-          <a:p>
-            <a:pPr algn="l">
-              <a:defRPr sz="1125" b="0">
-                <a:solidFill>
-                  <a:srgbClr val="546170"/>
-                </a:solidFill>
-                <a:latin typeface="Aptos"/>
-                <a:ea typeface="Aptos"/>
-                <a:cs typeface="Aptos"/>
-              </a:defRPr>
-            </a:pPr>
-            <a:r>
-              <a:rPr sz="1125" b="0">
-                <a:solidFill>
-                  <a:srgbClr val="546170"/>
-                </a:solidFill>
-                <a:latin typeface="Aptos"/>
-                <a:ea typeface="Aptos"/>
-                <a:cs typeface="Aptos"/>
-              </a:rPr>
-              <a:t>промежуточное представление</a:t>
-            </a:r>
-          </a:p>
-        </p:txBody>
-      </p:sp>
-      <p:sp>
-        <p:nvSpPr>
-          <p:cNvPr id="26" name="diagram-node">
-            <a:extLst>
-              <a:ext uri="{FF2B5EF4-FFF2-40B4-BE49-F238E27FC236}">
-                <a16:creationId xmlns:a16="http://schemas.microsoft.com/office/drawing/2014/main" id="{AC0FF9C1-957D-45D0-8DAB-D72CD200499D}"/>
-              </a:ext>
-            </a:extLst>
-          </p:cNvPr>
-          <p:cNvSpPr>
-            <a:spLocks noGrp="1"/>
-          </p:cNvSpPr>
-          <p:nvPr/>
-        </p:nvSpPr>
-        <p:spPr>
-          <a:xfrm>
-            <a:off x="7429500" y="3562350"/>
-            <a:ext cx="2143125" cy="952500"/>
-          </a:xfrm>
-          <a:prstGeom prst="rect">
-            <a:avLst/>
-          </a:prstGeom>
-          <a:solidFill>
-            <a:srgbClr val="E7F3F1"/>
-          </a:solidFill>
-          <a:ln w="9525">
-            <a:solidFill>
-              <a:srgbClr val="D8DDD6"/>
-            </a:solidFill>
-            <a:prstDash val="solid"/>
-          </a:ln>
-        </p:spPr>
-      </p:sp>
-      <p:sp>
-        <p:nvSpPr>
-          <p:cNvPr id="27" name="node-accent">
-            <a:extLst>
-              <a:ext uri="{FF2B5EF4-FFF2-40B4-BE49-F238E27FC236}">
-                <a16:creationId xmlns:a16="http://schemas.microsoft.com/office/drawing/2014/main" id="{0F2633CD-059D-4599-AE4E-C52EB82530FA}"/>
-              </a:ext>
-            </a:extLst>
-          </p:cNvPr>
-          <p:cNvSpPr>
-            <a:spLocks noGrp="1"/>
-          </p:cNvSpPr>
-          <p:nvPr/>
-        </p:nvSpPr>
-        <p:spPr>
-          <a:xfrm>
-            <a:off x="7429500" y="3562350"/>
-            <a:ext cx="57150" cy="952500"/>
-          </a:xfrm>
-          <a:prstGeom prst="rect">
-            <a:avLst/>
-          </a:prstGeom>
-          <a:solidFill>
-            <a:srgbClr val="0F766E"/>
-          </a:solidFill>
-          <a:ln w="0">
-            <a:solidFill>
-              <a:srgbClr val="000000">
-                <a:alpha val="0"/>
-              </a:srgbClr>
-            </a:solidFill>
-            <a:prstDash val="solid"/>
-          </a:ln>
-        </p:spPr>
-      </p:sp>
-      <p:sp>
-        <p:nvSpPr>
-          <p:cNvPr id="28" name="Rectangle 27">
-            <a:extLst>
-              <a:ext uri="{FF2B5EF4-FFF2-40B4-BE49-F238E27FC236}">
-                <a16:creationId xmlns:a16="http://schemas.microsoft.com/office/drawing/2014/main" id="{3DF9D9D9-9A51-4B24-9FEB-8208264DB293}"/>
-              </a:ext>
-            </a:extLst>
-          </p:cNvPr>
-          <p:cNvSpPr>
-            <a:spLocks noGrp="1"/>
-          </p:cNvSpPr>
-          <p:nvPr/>
-        </p:nvSpPr>
-        <p:spPr>
-          <a:xfrm>
-            <a:off x="7600950" y="3695700"/>
-            <a:ext cx="1800225" cy="342900"/>
-          </a:xfrm>
-          <a:prstGeom prst="rect">
-            <a:avLst/>
-          </a:prstGeom>
-          <a:solidFill>
-            <a:srgbClr val="000000">
-              <a:alpha val="0"/>
-            </a:srgbClr>
-          </a:solidFill>
-          <a:ln w="0">
-            <a:solidFill>
-              <a:srgbClr val="000000">
-                <a:alpha val="0"/>
-              </a:srgbClr>
-            </a:solidFill>
-            <a:prstDash val="solid"/>
-          </a:ln>
-        </p:spPr>
-        <p:txBody>
-          <a:bodyPr lIns="0" tIns="0" rIns="0" bIns="0" anchor="t"/>
-          <a:lstStyle/>
-          <a:p>
-            <a:pPr algn="l">
-              <a:defRPr sz="1425" b="1">
-                <a:solidFill>
-                  <a:srgbClr val="17202A"/>
-                </a:solidFill>
-                <a:latin typeface="Aptos"/>
-                <a:ea typeface="Aptos"/>
-                <a:cs typeface="Aptos"/>
-              </a:defRPr>
-            </a:pPr>
-            <a:r>
-              <a:rPr sz="1425" b="1">
-                <a:solidFill>
-                  <a:srgbClr val="17202A"/>
-                </a:solidFill>
-                <a:latin typeface="Aptos"/>
-                <a:ea typeface="Aptos"/>
-                <a:cs typeface="Aptos"/>
-              </a:rPr>
-              <a:t>Верификатор</a:t>
-            </a:r>
-          </a:p>
-        </p:txBody>
-      </p:sp>
-      <p:sp>
-        <p:nvSpPr>
-          <p:cNvPr id="29" name="Rectangle 28">
-            <a:extLst>
-              <a:ext uri="{FF2B5EF4-FFF2-40B4-BE49-F238E27FC236}">
-                <a16:creationId xmlns:a16="http://schemas.microsoft.com/office/drawing/2014/main" id="{47C4FA66-30CA-4580-AF4B-96478CD46190}"/>
-              </a:ext>
-            </a:extLst>
-          </p:cNvPr>
-          <p:cNvSpPr>
-            <a:spLocks noGrp="1"/>
-          </p:cNvSpPr>
-          <p:nvPr/>
-        </p:nvSpPr>
-        <p:spPr>
-          <a:xfrm>
-            <a:off x="7600950" y="4076700"/>
-            <a:ext cx="1800225" cy="323850"/>
-          </a:xfrm>
-          <a:prstGeom prst="rect">
-            <a:avLst/>
-          </a:prstGeom>
-          <a:solidFill>
-            <a:srgbClr val="000000">
-              <a:alpha val="0"/>
-            </a:srgbClr>
-          </a:solidFill>
-          <a:ln w="0">
-            <a:solidFill>
-              <a:srgbClr val="000000">
-                <a:alpha val="0"/>
-              </a:srgbClr>
-            </a:solidFill>
-            <a:prstDash val="solid"/>
-          </a:ln>
-        </p:spPr>
-        <p:txBody>
-          <a:bodyPr lIns="0" tIns="0" rIns="0" bIns="0" anchor="t"/>
-          <a:lstStyle/>
-          <a:p>
-            <a:pPr algn="l">
-              <a:defRPr sz="1125" b="0">
-                <a:solidFill>
-                  <a:srgbClr val="546170"/>
-                </a:solidFill>
-                <a:latin typeface="Aptos"/>
-                <a:ea typeface="Aptos"/>
-                <a:cs typeface="Aptos"/>
-              </a:defRPr>
-            </a:pPr>
-            <a:r>
-              <a:rPr sz="1125" b="0">
-                <a:solidFill>
-                  <a:srgbClr val="546170"/>
-                </a:solidFill>
-                <a:latin typeface="Aptos"/>
-                <a:ea typeface="Aptos"/>
-                <a:cs typeface="Aptos"/>
-              </a:rPr>
-              <a:t>статическая проверка метода</a:t>
-            </a:r>
-          </a:p>
-        </p:txBody>
-      </p:sp>
-      <p:sp>
-        <p:nvSpPr>
-          <p:cNvPr id="30" name="arrow-line">
-            <a:extLst>
-              <a:ext uri="{FF2B5EF4-FFF2-40B4-BE49-F238E27FC236}">
-                <a16:creationId xmlns:a16="http://schemas.microsoft.com/office/drawing/2014/main" id="{C9434075-5EDE-4174-A945-EE28FDCDBD01}"/>
-              </a:ext>
-            </a:extLst>
-          </p:cNvPr>
-          <p:cNvSpPr>
-            <a:spLocks noGrp="1"/>
-          </p:cNvSpPr>
-          <p:nvPr/>
-        </p:nvSpPr>
-        <p:spPr>
-          <a:xfrm>
-            <a:off x="9544050" y="4000500"/>
-            <a:ext cx="609600" cy="19050"/>
-          </a:xfrm>
-          <a:prstGeom prst="rect">
-            <a:avLst/>
-          </a:prstGeom>
-          <a:solidFill>
-            <a:srgbClr val="0F766E"/>
-          </a:solidFill>
-          <a:ln w="0">
-            <a:solidFill>
-              <a:srgbClr val="000000">
-                <a:alpha val="0"/>
-              </a:srgbClr>
-            </a:solidFill>
-            <a:prstDash val="solid"/>
-          </a:ln>
-        </p:spPr>
-      </p:sp>
-      <p:sp>
-        <p:nvSpPr>
-          <p:cNvPr id="31" name="Rectangle 30">
-            <a:extLst>
-              <a:ext uri="{FF2B5EF4-FFF2-40B4-BE49-F238E27FC236}">
-                <a16:creationId xmlns:a16="http://schemas.microsoft.com/office/drawing/2014/main" id="{B4D57484-8C1F-430C-858F-AB63038C6F69}"/>
-              </a:ext>
-            </a:extLst>
-          </p:cNvPr>
-          <p:cNvSpPr>
-            <a:spLocks noGrp="1"/>
-          </p:cNvSpPr>
-          <p:nvPr/>
-        </p:nvSpPr>
-        <p:spPr>
-          <a:xfrm>
-            <a:off x="10153650" y="3886200"/>
-            <a:ext cx="171450" cy="266700"/>
-          </a:xfrm>
-          <a:prstGeom prst="rect">
-            <a:avLst/>
-          </a:prstGeom>
-          <a:solidFill>
-            <a:srgbClr val="000000">
-              <a:alpha val="0"/>
-            </a:srgbClr>
-          </a:solidFill>
-          <a:ln w="0">
-            <a:solidFill>
-              <a:srgbClr val="000000">
-                <a:alpha val="0"/>
-              </a:srgbClr>
-            </a:solidFill>
-            <a:prstDash val="solid"/>
-          </a:ln>
-        </p:spPr>
-        <p:txBody>
-          <a:bodyPr lIns="0" tIns="0" rIns="0" bIns="0" anchor="t"/>
-          <a:lstStyle/>
-          <a:p>
-            <a:pPr algn="ctr">
-              <a:defRPr sz="1650" b="1">
-                <a:solidFill>
-                  <a:srgbClr val="0F766E"/>
-                </a:solidFill>
-                <a:latin typeface="Aptos"/>
-                <a:ea typeface="Aptos"/>
-                <a:cs typeface="Aptos"/>
-              </a:defRPr>
-            </a:pPr>
-            <a:r>
-              <a:rPr sz="1650" b="1">
-                <a:solidFill>
-                  <a:srgbClr val="0F766E"/>
-                </a:solidFill>
-                <a:latin typeface="Aptos"/>
-                <a:ea typeface="Aptos"/>
-                <a:cs typeface="Aptos"/>
-              </a:rPr>
-              <a:t>&gt;</a:t>
-            </a:r>
-          </a:p>
-        </p:txBody>
-      </p:sp>
-      <p:sp>
-        <p:nvSpPr>
-          <p:cNvPr id="32" name="diagram-node">
-            <a:extLst>
-              <a:ext uri="{FF2B5EF4-FFF2-40B4-BE49-F238E27FC236}">
-                <a16:creationId xmlns:a16="http://schemas.microsoft.com/office/drawing/2014/main" id="{E5BAD49C-D2C3-4A8C-B584-3DB697622229}"/>
-              </a:ext>
-            </a:extLst>
-          </p:cNvPr>
-          <p:cNvSpPr>
-            <a:spLocks noGrp="1"/>
-          </p:cNvSpPr>
-          <p:nvPr/>
-        </p:nvSpPr>
-        <p:spPr>
-          <a:xfrm>
-            <a:off x="10334625" y="3467100"/>
-            <a:ext cx="1638300" cy="1219200"/>
-          </a:xfrm>
-          <a:prstGeom prst="rect">
-            <a:avLst/>
-          </a:prstGeom>
-          <a:solidFill>
-            <a:srgbClr val="FFFFFF"/>
-          </a:solidFill>
-          <a:ln w="9525">
-            <a:solidFill>
-              <a:srgbClr val="D8DDD6"/>
-            </a:solidFill>
-            <a:prstDash val="solid"/>
-          </a:ln>
-        </p:spPr>
-      </p:sp>
-      <p:sp>
-        <p:nvSpPr>
-          <p:cNvPr id="33" name="node-accent">
-            <a:extLst>
-              <a:ext uri="{FF2B5EF4-FFF2-40B4-BE49-F238E27FC236}">
-                <a16:creationId xmlns:a16="http://schemas.microsoft.com/office/drawing/2014/main" id="{BFFF711F-5096-4F92-A01D-26E618D3E432}"/>
-              </a:ext>
-            </a:extLst>
-          </p:cNvPr>
-          <p:cNvSpPr>
-            <a:spLocks noGrp="1"/>
-          </p:cNvSpPr>
-          <p:nvPr/>
-        </p:nvSpPr>
-        <p:spPr>
-          <a:xfrm flipH="1">
-            <a:off x="10296117" y="3467099"/>
-            <a:ext cx="45719" cy="1219199"/>
-          </a:xfrm>
-          <a:prstGeom prst="rect">
-            <a:avLst/>
-          </a:prstGeom>
-          <a:solidFill>
-            <a:srgbClr val="0F766E"/>
-          </a:solidFill>
-          <a:ln w="0">
-            <a:solidFill>
-              <a:srgbClr val="000000">
-                <a:alpha val="0"/>
-              </a:srgbClr>
-            </a:solidFill>
-            <a:prstDash val="solid"/>
-          </a:ln>
-        </p:spPr>
-      </p:sp>
-      <p:sp>
-        <p:nvSpPr>
-          <p:cNvPr id="34" name="Rectangle 33">
-            <a:extLst>
-              <a:ext uri="{FF2B5EF4-FFF2-40B4-BE49-F238E27FC236}">
-                <a16:creationId xmlns:a16="http://schemas.microsoft.com/office/drawing/2014/main" id="{089B9904-95A6-4516-AD49-52216D1B0EA1}"/>
-              </a:ext>
-            </a:extLst>
-          </p:cNvPr>
-          <p:cNvSpPr>
-            <a:spLocks noGrp="1"/>
-          </p:cNvSpPr>
-          <p:nvPr/>
-        </p:nvSpPr>
-        <p:spPr>
-          <a:xfrm>
-            <a:off x="10515600" y="3695700"/>
-            <a:ext cx="1295400" cy="342900"/>
-          </a:xfrm>
-          <a:prstGeom prst="rect">
-            <a:avLst/>
-          </a:prstGeom>
-          <a:solidFill>
-            <a:srgbClr val="000000">
-              <a:alpha val="0"/>
-            </a:srgbClr>
-          </a:solidFill>
-          <a:ln w="0">
-            <a:solidFill>
-              <a:srgbClr val="000000">
-                <a:alpha val="0"/>
-              </a:srgbClr>
-            </a:solidFill>
-            <a:prstDash val="solid"/>
-          </a:ln>
-        </p:spPr>
-        <p:txBody>
-          <a:bodyPr lIns="0" tIns="0" rIns="0" bIns="0" anchor="t"/>
-          <a:lstStyle/>
-          <a:p>
-            <a:pPr algn="l">
-              <a:defRPr sz="1425" b="1">
-                <a:solidFill>
-                  <a:srgbClr val="17202A"/>
-                </a:solidFill>
-                <a:latin typeface="Aptos"/>
-                <a:ea typeface="Aptos"/>
-                <a:cs typeface="Aptos"/>
-              </a:defRPr>
-            </a:pPr>
-            <a:r>
-              <a:rPr sz="1425" b="1">
-                <a:solidFill>
-                  <a:srgbClr val="17202A"/>
-                </a:solidFill>
-                <a:latin typeface="Aptos"/>
-                <a:ea typeface="Aptos"/>
-                <a:cs typeface="Aptos"/>
-              </a:rPr>
-              <a:t>VM / runtime</a:t>
-            </a:r>
-          </a:p>
-        </p:txBody>
-      </p:sp>
-      <p:sp>
-        <p:nvSpPr>
-          <p:cNvPr id="35" name="Rectangle 34">
-            <a:extLst>
-              <a:ext uri="{FF2B5EF4-FFF2-40B4-BE49-F238E27FC236}">
-                <a16:creationId xmlns:a16="http://schemas.microsoft.com/office/drawing/2014/main" id="{74876613-C646-4D32-849F-AEB0859523A1}"/>
-              </a:ext>
-            </a:extLst>
-          </p:cNvPr>
-          <p:cNvSpPr>
-            <a:spLocks noGrp="1"/>
-          </p:cNvSpPr>
-          <p:nvPr/>
-        </p:nvSpPr>
-        <p:spPr>
-          <a:xfrm>
-            <a:off x="10515600" y="4076700"/>
-            <a:ext cx="1295400" cy="438150"/>
-          </a:xfrm>
-          <a:prstGeom prst="rect">
-            <a:avLst/>
-          </a:prstGeom>
-          <a:solidFill>
-            <a:srgbClr val="000000">
-              <a:alpha val="0"/>
-            </a:srgbClr>
-          </a:solidFill>
-          <a:ln w="0">
-            <a:solidFill>
-              <a:srgbClr val="000000">
-                <a:alpha val="0"/>
-              </a:srgbClr>
-            </a:solidFill>
-            <a:prstDash val="solid"/>
-          </a:ln>
-        </p:spPr>
-        <p:txBody>
-          <a:bodyPr lIns="0" tIns="0" rIns="0" bIns="0" anchor="t"/>
-          <a:lstStyle/>
-          <a:p>
-            <a:pPr algn="l">
-              <a:defRPr sz="1125" b="0">
-                <a:solidFill>
-                  <a:srgbClr val="546170"/>
-                </a:solidFill>
-                <a:latin typeface="Aptos"/>
-                <a:ea typeface="Aptos"/>
-                <a:cs typeface="Aptos"/>
-              </a:defRPr>
-            </a:pPr>
-            <a:r>
-              <a:rPr sz="1125" b="0">
-                <a:solidFill>
-                  <a:srgbClr val="546170"/>
-                </a:solidFill>
-                <a:latin typeface="Aptos"/>
-                <a:ea typeface="Aptos"/>
-                <a:cs typeface="Aptos"/>
-              </a:rPr>
-              <a:t>исполнение без повторения всех проверок</a:t>
-            </a:r>
-          </a:p>
-        </p:txBody>
-      </p:sp>
-      <p:sp>
-        <p:nvSpPr>
-          <p:cNvPr id="37" name="Rectangle 36">
-            <a:extLst>
-              <a:ext uri="{FF2B5EF4-FFF2-40B4-BE49-F238E27FC236}">
-                <a16:creationId xmlns:a16="http://schemas.microsoft.com/office/drawing/2014/main" id="{ABF49B3D-0073-4D5C-B5ED-0C4F954778C7}"/>
-              </a:ext>
-            </a:extLst>
-          </p:cNvPr>
-          <p:cNvSpPr>
-            <a:spLocks noGrp="1"/>
-          </p:cNvSpPr>
-          <p:nvPr/>
-        </p:nvSpPr>
-        <p:spPr>
-          <a:xfrm>
-            <a:off x="666750" y="4953000"/>
-            <a:ext cx="5429250" cy="495300"/>
-          </a:xfrm>
-          <a:prstGeom prst="rect">
-            <a:avLst/>
-          </a:prstGeom>
-          <a:solidFill>
-            <a:srgbClr val="000000">
-              <a:alpha val="0"/>
-            </a:srgbClr>
-          </a:solidFill>
-          <a:ln w="0">
-            <a:solidFill>
-              <a:srgbClr val="000000">
-                <a:alpha val="0"/>
-              </a:srgbClr>
-            </a:solidFill>
-            <a:prstDash val="solid"/>
-          </a:ln>
-        </p:spPr>
-        <p:txBody>
-          <a:bodyPr lIns="0" tIns="0" rIns="0" bIns="0" anchor="t"/>
-          <a:lstStyle/>
-          <a:p>
-            <a:pPr algn="l">
-              <a:defRPr sz="1650" b="1">
-                <a:solidFill>
-                  <a:srgbClr val="17202A"/>
-                </a:solidFill>
-                <a:latin typeface="Aptos"/>
-                <a:ea typeface="Aptos"/>
-                <a:cs typeface="Aptos"/>
-              </a:defRPr>
-            </a:pPr>
-            <a:r>
-              <a:rPr sz="1650" b="1" dirty="0" err="1">
-                <a:solidFill>
-                  <a:srgbClr val="17202A"/>
-                </a:solidFill>
-                <a:latin typeface="Aptos"/>
-                <a:ea typeface="Aptos"/>
-                <a:cs typeface="Aptos"/>
-              </a:rPr>
-              <a:t>Ценность</a:t>
-            </a:r>
-            <a:r>
-              <a:rPr sz="1650" b="1" dirty="0">
-                <a:solidFill>
-                  <a:srgbClr val="17202A"/>
-                </a:solidFill>
-                <a:latin typeface="Aptos"/>
-                <a:ea typeface="Aptos"/>
-                <a:cs typeface="Aptos"/>
-              </a:rPr>
-              <a:t>: </a:t>
-            </a:r>
-            <a:r>
-              <a:rPr lang="ru-RU" sz="1650" b="1" dirty="0">
-                <a:solidFill>
-                  <a:srgbClr val="17202A"/>
-                </a:solidFill>
-                <a:latin typeface="Aptos"/>
-                <a:ea typeface="Aptos"/>
-                <a:cs typeface="Aptos"/>
-              </a:rPr>
-              <a:t>минимизация </a:t>
-            </a:r>
-            <a:r>
-              <a:rPr sz="1650" b="1" dirty="0" err="1">
-                <a:solidFill>
-                  <a:srgbClr val="17202A"/>
-                </a:solidFill>
-                <a:latin typeface="Aptos"/>
-                <a:ea typeface="Aptos"/>
-                <a:cs typeface="Aptos"/>
-              </a:rPr>
-              <a:t>аварийных</a:t>
-            </a:r>
-            <a:r>
-              <a:rPr sz="1650" b="1" dirty="0">
-                <a:solidFill>
-                  <a:srgbClr val="17202A"/>
-                </a:solidFill>
-                <a:latin typeface="Aptos"/>
-                <a:ea typeface="Aptos"/>
-                <a:cs typeface="Aptos"/>
-              </a:rPr>
-              <a:t> </a:t>
-            </a:r>
-            <a:r>
-              <a:rPr sz="1650" b="1" dirty="0" err="1">
-                <a:solidFill>
-                  <a:srgbClr val="17202A"/>
-                </a:solidFill>
-                <a:latin typeface="Aptos"/>
-                <a:ea typeface="Aptos"/>
-                <a:cs typeface="Aptos"/>
-              </a:rPr>
-              <a:t>сценариев</a:t>
-            </a:r>
-            <a:r>
-              <a:rPr lang="ru-RU" sz="1650" b="1" dirty="0">
-                <a:solidFill>
-                  <a:srgbClr val="17202A"/>
-                </a:solidFill>
-                <a:latin typeface="Aptos"/>
-                <a:ea typeface="Aptos"/>
-                <a:cs typeface="Aptos"/>
-              </a:rPr>
-              <a:t> на этапе исполнения</a:t>
-            </a:r>
-            <a:r>
-              <a:rPr sz="1650" b="1" dirty="0">
-                <a:solidFill>
-                  <a:srgbClr val="17202A"/>
-                </a:solidFill>
-                <a:latin typeface="Aptos"/>
-                <a:ea typeface="Aptos"/>
-                <a:cs typeface="Aptos"/>
-              </a:rPr>
-              <a:t>.</a:t>
-            </a:r>
-          </a:p>
-        </p:txBody>
-      </p:sp>
-      <p:sp>
-        <p:nvSpPr>
-          <p:cNvPr id="36" name="node-accent">
-            <a:extLst>
-              <a:ext uri="{FF2B5EF4-FFF2-40B4-BE49-F238E27FC236}">
-                <a16:creationId xmlns:a16="http://schemas.microsoft.com/office/drawing/2014/main" id="{255CF626-9A3F-4B12-2469-41F7C51C8225}"/>
-              </a:ext>
-            </a:extLst>
-          </p:cNvPr>
-          <p:cNvSpPr>
-            <a:spLocks noGrp="1"/>
-          </p:cNvSpPr>
-          <p:nvPr/>
-        </p:nvSpPr>
-        <p:spPr>
-          <a:xfrm>
-            <a:off x="8667750" y="1933575"/>
-            <a:ext cx="57150" cy="876300"/>
-          </a:xfrm>
-          <a:prstGeom prst="rect">
-            <a:avLst/>
-          </a:prstGeom>
-          <a:solidFill>
-            <a:srgbClr val="0F766E"/>
-          </a:solidFill>
-          <a:ln w="0">
-            <a:solidFill>
-              <a:srgbClr val="000000">
-                <a:alpha val="0"/>
-              </a:srgbClr>
-            </a:solidFill>
-            <a:prstDash val="solid"/>
-          </a:ln>
-        </p:spPr>
-      </p:sp>
-      <p:sp>
-        <p:nvSpPr>
-          <p:cNvPr id="39" name="TextBox 38">
-            <a:extLst>
-              <a:ext uri="{FF2B5EF4-FFF2-40B4-BE49-F238E27FC236}">
-                <a16:creationId xmlns:a16="http://schemas.microsoft.com/office/drawing/2014/main" id="{50526B08-37B6-CAB7-73E4-38E352772A51}"/>
-              </a:ext>
-            </a:extLst>
-          </p:cNvPr>
-          <p:cNvSpPr txBox="1"/>
-          <p:nvPr/>
-        </p:nvSpPr>
-        <p:spPr>
-          <a:xfrm>
-            <a:off x="11667281" y="6493397"/>
-            <a:ext cx="301686" cy="369332"/>
-          </a:xfrm>
-          <a:prstGeom prst="rect">
-            <a:avLst/>
-          </a:prstGeom>
-          <a:noFill/>
-        </p:spPr>
-        <p:txBody>
-          <a:bodyPr wrap="none" rtlCol="0">
-            <a:spAutoFit/>
-          </a:bodyPr>
-          <a:lstStyle/>
-          <a:p>
-            <a:r>
-              <a:rPr lang="en-RU" dirty="0"/>
-              <a:t>2</a:t>
-            </a:r>
           </a:p>
         </p:txBody>
       </p:sp>
@@ -5032,6 +5032,13 @@
             <a:prstDash val="solid"/>
           </a:ln>
         </p:spPr>
+        <p:txBody>
+          <a:bodyPr/>
+          <a:lstStyle/>
+          <a:p>
+            <a:endParaRPr lang="en-RU" dirty="0"/>
+          </a:p>
+        </p:txBody>
       </p:sp>
       <p:sp>
         <p:nvSpPr>
@@ -5154,7 +5161,7 @@
               </a:defRPr>
             </a:pPr>
             <a:r>
-              <a:rPr sz="900" b="0">
+              <a:rPr sz="900" b="0" dirty="0">
                 <a:solidFill>
                   <a:srgbClr val="546170"/>
                 </a:solidFill>
@@ -5162,7 +5169,7 @@
                 <a:ea typeface="Aptos"/>
                 <a:cs typeface="Aptos"/>
               </a:rPr>
-              <a:t>ArkTS bytecode verifier</a:t>
+              <a:t>bytecode verifier</a:t>
             </a:r>
           </a:p>
         </p:txBody>
@@ -6642,7 +6649,29 @@
                 <a:ea typeface="Aptos"/>
                 <a:cs typeface="Aptos"/>
               </a:rPr>
-              <a:t> ETS- </a:t>
+              <a:t> </a:t>
+            </a:r>
+            <a:r>
+              <a:rPr lang="en-US" sz="1125" b="0" dirty="0">
+                <a:solidFill>
+                  <a:srgbClr val="546170"/>
+                </a:solidFill>
+                <a:latin typeface="Aptos"/>
+                <a:ea typeface="Aptos"/>
+                <a:cs typeface="Aptos"/>
+              </a:rPr>
+              <a:t>Plugin-</a:t>
+            </a:r>
+            <a:r>
+              <a:rPr sz="1125" b="0" dirty="0">
+                <a:solidFill>
+                  <a:srgbClr val="546170"/>
+                </a:solidFill>
+                <a:latin typeface="Aptos"/>
+                <a:ea typeface="Aptos"/>
+                <a:cs typeface="Aptos"/>
+              </a:rPr>
+              <a:t> </a:t>
             </a:r>
             <a:r>
               <a:rPr sz="1125" b="0" dirty="0" err="1">
@@ -7399,7 +7428,7 @@
               </a:defRPr>
             </a:pPr>
             <a:r>
-              <a:rPr sz="900" b="0">
+              <a:rPr sz="900" b="0" dirty="0">
                 <a:solidFill>
                   <a:srgbClr val="546170"/>
                 </a:solidFill>
@@ -7407,7 +7436,7 @@
                 <a:ea typeface="Aptos"/>
                 <a:cs typeface="Aptos"/>
               </a:rPr>
-              <a:t>ArkTS bytecode verifier</a:t>
+              <a:t>bytecode verifier</a:t>
             </a:r>
           </a:p>
         </p:txBody>
@@ -10349,7 +10378,7 @@
               </a:defRPr>
             </a:pPr>
             <a:r>
-              <a:rPr sz="900" b="0">
+              <a:rPr sz="900" b="0" dirty="0">
                 <a:solidFill>
                   <a:srgbClr val="546170"/>
                 </a:solidFill>
@@ -10357,7 +10386,7 @@
                 <a:ea typeface="Aptos"/>
                 <a:cs typeface="Aptos"/>
               </a:rPr>
-              <a:t>ArkTS bytecode verifier</a:t>
+              <a:t>bytecode verifier</a:t>
             </a:r>
           </a:p>
         </p:txBody>
@@ -11173,7 +11202,7 @@
               </a:defRPr>
             </a:pPr>
             <a:r>
-              <a:rPr sz="1875" b="1">
+              <a:rPr lang="en-US" sz="1875" b="1" dirty="0" err="1">
                 <a:solidFill>
                   <a:srgbClr val="17202A"/>
                 </a:solidFill>
@@ -11181,7 +11210,29 @@
                 <a:ea typeface="Aptos Display"/>
                 <a:cs typeface="Aptos Display"/>
               </a:rPr>
-              <a:t>ets.call.name.*</a:t>
+              <a:t>plugin</a:t>
+            </a:r>
+            <a:r>
+              <a:rPr sz="1875" b="1" dirty="0" err="1">
+                <a:solidFill>
+                  <a:srgbClr val="17202A"/>
+                </a:solidFill>
+                <a:latin typeface="Aptos Display"/>
+                <a:ea typeface="Aptos Display"/>
+                <a:cs typeface="Aptos Display"/>
+              </a:rPr>
+              <a:t>.call.name</a:t>
+            </a:r>
+            <a:r>
+              <a:rPr sz="1875" b="1" dirty="0">
+                <a:solidFill>
+                  <a:srgbClr val="17202A"/>
+                </a:solidFill>
+                <a:latin typeface="Aptos Display"/>
+                <a:ea typeface="Aptos Display"/>
+                <a:cs typeface="Aptos Display"/>
+              </a:rPr>
+              <a:t>.*</a:t>
             </a:r>
           </a:p>
         </p:txBody>
@@ -12297,7 +12348,7 @@
               </a:defRPr>
             </a:pPr>
             <a:r>
-              <a:rPr sz="900" b="0">
+              <a:rPr sz="900" b="0" dirty="0">
                 <a:solidFill>
                   <a:srgbClr val="546170"/>
                 </a:solidFill>
@@ -12305,7 +12356,7 @@
                 <a:ea typeface="Aptos"/>
                 <a:cs typeface="Aptos"/>
               </a:rPr>
-              <a:t>ArkTS bytecode verifier</a:t>
+              <a:t>bytecode verifier</a:t>
             </a:r>
           </a:p>
         </p:txBody>
@@ -14370,7 +14421,7 @@
         <p:spPr>
           <a:xfrm>
             <a:off x="667755" y="2054780"/>
-            <a:ext cx="1490921" cy="369332"/>
+            <a:ext cx="1371786" cy="369332"/>
           </a:xfrm>
           <a:prstGeom prst="rect">
             <a:avLst/>
@@ -14385,7 +14436,7 @@
           <a:p>
             <a:r>
               <a:rPr lang="en-RU" dirty="0"/>
-              <a:t>//example.ets</a:t>
+              <a:t>//example.ts</a:t>
             </a:r>
           </a:p>
         </p:txBody>
@@ -14710,7 +14761,7 @@
               </a:defRPr>
             </a:pPr>
             <a:r>
-              <a:rPr sz="900" b="0">
+              <a:rPr sz="900" b="0" dirty="0">
                 <a:solidFill>
                   <a:srgbClr val="546170"/>
                 </a:solidFill>
@@ -14718,7 +14769,7 @@
                 <a:ea typeface="Aptos"/>
                 <a:cs typeface="Aptos"/>
               </a:rPr>
-              <a:t>ArkTS bytecode verifier</a:t>
+              <a:t>bytecode verifier</a:t>
             </a:r>
           </a:p>
         </p:txBody>
@@ -14809,7 +14860,7 @@
               </a:defRPr>
             </a:pPr>
             <a:r>
-              <a:rPr sz="975" b="1">
+              <a:rPr lang="en-US" sz="975" b="1" dirty="0">
                 <a:solidFill>
                   <a:srgbClr val="0F766E"/>
                 </a:solidFill>
@@ -14817,7 +14868,18 @@
                 <a:ea typeface="Aptos"/>
                 <a:cs typeface="Aptos"/>
               </a:rPr>
-              <a:t>ETS ВЫЗОВЫ</a:t>
+              <a:t>PLUGIN</a:t>
+            </a:r>
+            <a:r>
+              <a:rPr sz="975" b="1" dirty="0">
+                <a:solidFill>
+                  <a:srgbClr val="0F766E"/>
+                </a:solidFill>
+                <a:latin typeface="Aptos"/>
+                <a:ea typeface="Aptos"/>
+                <a:cs typeface="Aptos"/>
+              </a:rPr>
+              <a:t> ВЫЗОВЫ</a:t>
             </a:r>
           </a:p>
         </p:txBody>
@@ -14873,7 +14935,7 @@
               </a:defRPr>
             </a:pPr>
             <a:r>
-              <a:rPr sz="2700" b="1" dirty="0" err="1">
+              <a:rPr lang="en-US" sz="2700" b="1" dirty="0" err="1">
                 <a:solidFill>
                   <a:srgbClr val="17202A"/>
                 </a:solidFill>
@@ -14881,7 +14943,18 @@
                 <a:ea typeface="Aptos Display"/>
                 <a:cs typeface="Aptos Display"/>
               </a:rPr>
-              <a:t>ets.call.name</a:t>
+              <a:t>plugin</a:t>
+            </a:r>
+            <a:r>
+              <a:rPr sz="2700" b="1" dirty="0" err="1">
+                <a:solidFill>
+                  <a:srgbClr val="17202A"/>
+                </a:solidFill>
+                <a:latin typeface="Aptos Display"/>
+                <a:ea typeface="Aptos Display"/>
+                <a:cs typeface="Aptos Display"/>
+              </a:rPr>
+              <a:t>.call.name</a:t>
             </a:r>
             <a:r>
               <a:rPr sz="2700" b="1" dirty="0">
@@ -15003,7 +15076,7 @@
               </a:defRPr>
             </a:pPr>
             <a:r>
-              <a:rPr sz="1275" b="0" dirty="0" err="1">
+              <a:rPr lang="en-US" sz="1275" b="0" dirty="0" err="1">
                 <a:solidFill>
                   <a:srgbClr val="25303A"/>
                 </a:solidFill>
@@ -15011,7 +15084,18 @@
                 <a:ea typeface="Aptos Mono"/>
                 <a:cs typeface="Aptos Mono"/>
               </a:rPr>
-              <a:t>ets.call.name.short</a:t>
+              <a:t>plugin</a:t>
+            </a:r>
+            <a:r>
+              <a:rPr sz="1275" b="0" dirty="0" err="1">
+                <a:solidFill>
+                  <a:srgbClr val="25303A"/>
+                </a:solidFill>
+                <a:latin typeface="Aptos Mono"/>
+                <a:ea typeface="Aptos Mono"/>
+                <a:cs typeface="Aptos Mono"/>
+              </a:rPr>
+              <a:t>.call.name.short</a:t>
             </a:r>
             <a:r>
               <a:rPr sz="1275" b="0" dirty="0">
@@ -16806,7 +16890,7 @@
           <a:p>
             <a:r>
               <a:rPr lang="en-RU" sz="1200" dirty="0"/>
-              <a:t>//example.ets</a:t>
+              <a:t>//example.ts</a:t>
             </a:r>
           </a:p>
         </p:txBody>
@@ -17032,7 +17116,7 @@
               </a:defRPr>
             </a:pPr>
             <a:r>
-              <a:rPr sz="900" b="0">
+              <a:rPr sz="900" b="0" dirty="0">
                 <a:solidFill>
                   <a:srgbClr val="546170"/>
                 </a:solidFill>
@@ -17040,7 +17124,7 @@
                 <a:ea typeface="Aptos"/>
                 <a:cs typeface="Aptos"/>
               </a:rPr>
-              <a:t>ArkTS bytecode verifier</a:t>
+              <a:t>bytecode verifier</a:t>
             </a:r>
           </a:p>
         </p:txBody>
@@ -18575,7 +18659,7 @@
               </a:defRPr>
             </a:pPr>
             <a:r>
-              <a:rPr sz="900" b="0" dirty="0" err="1">
+              <a:rPr sz="900" b="0" dirty="0">
                 <a:solidFill>
                   <a:srgbClr val="546170"/>
                 </a:solidFill>
@@ -18583,18 +18667,7 @@
                 <a:ea typeface="Aptos"/>
                 <a:cs typeface="Aptos"/>
               </a:rPr>
-              <a:t>ArkTS</a:t>
-            </a:r>
-            <a:r>
-              <a:rPr sz="900" b="0" dirty="0">
-                <a:solidFill>
-                  <a:srgbClr val="546170"/>
-                </a:solidFill>
-                <a:latin typeface="Aptos"/>
-                <a:ea typeface="Aptos"/>
-                <a:cs typeface="Aptos"/>
-              </a:rPr>
-              <a:t> bytecode verifier</a:t>
+              <a:t>bytecode verifier</a:t>
             </a:r>
           </a:p>
         </p:txBody>
@@ -19097,15 +19170,81 @@
               </a:defRPr>
             </a:pPr>
             <a:r>
-              <a:rPr sz="1500" b="0">
-                <a:solidFill>
-                  <a:srgbClr val="17202A"/>
-                </a:solidFill>
-                <a:latin typeface="Aptos"/>
-                <a:ea typeface="Aptos"/>
-                <a:cs typeface="Aptos"/>
-              </a:rPr>
-              <a:t>реализованы обработчики ets.call.name.short / full / range</a:t>
+              <a:rPr sz="1500" b="0" dirty="0" err="1">
+                <a:solidFill>
+                  <a:srgbClr val="17202A"/>
+                </a:solidFill>
+                <a:latin typeface="Aptos"/>
+                <a:ea typeface="Aptos"/>
+                <a:cs typeface="Aptos"/>
+              </a:rPr>
+              <a:t>реализованы</a:t>
+            </a:r>
+            <a:r>
+              <a:rPr sz="1500" b="0" dirty="0">
+                <a:solidFill>
+                  <a:srgbClr val="17202A"/>
+                </a:solidFill>
+                <a:latin typeface="Aptos"/>
+                <a:ea typeface="Aptos"/>
+                <a:cs typeface="Aptos"/>
+              </a:rPr>
+              <a:t> </a:t>
+            </a:r>
+            <a:r>
+              <a:rPr sz="1500" b="0" dirty="0" err="1">
+                <a:solidFill>
+                  <a:srgbClr val="17202A"/>
+                </a:solidFill>
+                <a:latin typeface="Aptos"/>
+                <a:ea typeface="Aptos"/>
+                <a:cs typeface="Aptos"/>
+              </a:rPr>
+              <a:t>обработчики</a:t>
+            </a:r>
+            <a:r>
+              <a:rPr sz="1500" b="0" dirty="0">
+                <a:solidFill>
+                  <a:srgbClr val="17202A"/>
+                </a:solidFill>
+                <a:latin typeface="Aptos"/>
+                <a:ea typeface="Aptos"/>
+                <a:cs typeface="Aptos"/>
+              </a:rPr>
+              <a:t> </a:t>
+            </a:r>
+            <a:r>
+              <a:rPr lang="en-US" sz="1500" b="0" dirty="0" err="1">
+                <a:solidFill>
+                  <a:srgbClr val="17202A"/>
+                </a:solidFill>
+                <a:latin typeface="Aptos"/>
+                <a:ea typeface="Aptos"/>
+                <a:cs typeface="Aptos"/>
+              </a:rPr>
+              <a:t>plugin</a:t>
+            </a:r>
+            <a:r>
+              <a:rPr sz="1500" b="0" dirty="0" err="1">
+                <a:solidFill>
+                  <a:srgbClr val="17202A"/>
+                </a:solidFill>
+                <a:latin typeface="Aptos"/>
+                <a:ea typeface="Aptos"/>
+                <a:cs typeface="Aptos"/>
+              </a:rPr>
+              <a:t>.call.name.short</a:t>
+            </a:r>
+            <a:r>
+              <a:rPr sz="1500" b="0" dirty="0">
+                <a:solidFill>
+                  <a:srgbClr val="17202A"/>
+                </a:solidFill>
+                <a:latin typeface="Aptos"/>
+                <a:ea typeface="Aptos"/>
+                <a:cs typeface="Aptos"/>
+              </a:rPr>
+              <a:t> / full / range</a:t>
             </a:r>
           </a:p>
         </p:txBody>
